--- a/QT_Project.pptx
+++ b/QT_Project.pptx
@@ -1475,17 +1475,6 @@
             <a:pPr marL="0" indent="0">
               <a:buNone/>
             </a:pPr>
-            <a:r>
-              <a:rPr lang="en-US" sz="1300" b="1" kern="0" spc="300" dirty="0">
-                <a:solidFill>
-                  <a:srgbClr val="00C2A8"/>
-                </a:solidFill>
-                <a:latin typeface="Calibri" pitchFamily="34" charset="0"/>
-                <a:ea typeface="Calibri" pitchFamily="34" charset="-122"/>
-                <a:cs typeface="Calibri" pitchFamily="34" charset="-120"/>
-              </a:rPr>
-              <a:t>MODULE DESIGN REVIEW</a:t>
-            </a:r>
             <a:endParaRPr lang="en-US" sz="1300" dirty="0"/>
           </a:p>
         </p:txBody>
@@ -1538,28 +1527,18 @@
               <a:buNone/>
             </a:pPr>
             <a:r>
-              <a:rPr lang="en-US" sz="4400" b="1">
+              <a:rPr lang="ko-KR" altLang="en-US" sz="2400">
                 <a:solidFill>
-                  <a:srgbClr val="FFFFFF"/>
+                  <a:schemeClr val="bg1"/>
                 </a:solidFill>
-                <a:latin typeface="Cambria" pitchFamily="34" charset="0"/>
-                <a:ea typeface="Cambria" pitchFamily="34" charset="-122"/>
-                <a:cs typeface="Cambria" pitchFamily="34" charset="-120"/>
               </a:rPr>
-              <a:t>라이브러리 </a:t>
+              <a:t>예비단원 김민찬</a:t>
             </a:r>
-            <a:r>
-              <a:rPr lang="en-US" sz="4400" b="1" dirty="0">
-                <a:solidFill>
-                  <a:srgbClr val="FFFFFF"/>
-                </a:solidFill>
-                <a:latin typeface="Cambria" pitchFamily="34" charset="0"/>
-                <a:ea typeface="Cambria" pitchFamily="34" charset="-122"/>
-                <a:cs typeface="Cambria" pitchFamily="34" charset="-120"/>
-              </a:rPr>
-              <a:t>설계</a:t>
-            </a:r>
-            <a:endParaRPr lang="en-US" sz="4400" dirty="0"/>
+            <a:endParaRPr lang="en-US" sz="2400" dirty="0">
+              <a:solidFill>
+                <a:schemeClr val="bg1"/>
+              </a:solidFill>
+            </a:endParaRPr>
           </a:p>
         </p:txBody>
       </p:sp>
@@ -4661,6 +4640,17 @@
               <a:buNone/>
             </a:pPr>
             <a:r>
+              <a:rPr lang="en-US" sz="3000" b="1">
+                <a:solidFill>
+                  <a:srgbClr val="1A1A2E"/>
+                </a:solidFill>
+                <a:latin typeface="Cambria" pitchFamily="34" charset="0"/>
+                <a:ea typeface="Cambria" pitchFamily="34" charset="-122"/>
+                <a:cs typeface="Cambria" pitchFamily="34" charset="-120"/>
+              </a:rPr>
+              <a:t>map 라이브러리 </a:t>
+            </a:r>
+            <a:r>
               <a:rPr lang="en-US" sz="3000" b="1" dirty="0">
                 <a:solidFill>
                   <a:srgbClr val="1A1A2E"/>
@@ -4669,7 +4659,7 @@
                 <a:ea typeface="Cambria" pitchFamily="34" charset="-122"/>
                 <a:cs typeface="Cambria" pitchFamily="34" charset="-120"/>
               </a:rPr>
-              <a:t>map 라이브러리 공개 인터페이스</a:t>
+              <a:t>인터페이스</a:t>
             </a:r>
             <a:endParaRPr lang="en-US" sz="3000" dirty="0"/>
           </a:p>
@@ -4691,7 +4681,7 @@
         </p:nvGraphicFramePr>
         <p:xfrm>
           <a:off x="502920" y="1600200"/>
-          <a:ext cx="11185855" cy="4572000"/>
+          <a:ext cx="11185855" cy="4572001"/>
         </p:xfrm>
         <a:graphic>
           <a:graphicData uri="http://schemas.openxmlformats.org/drawingml/2006/table">
@@ -7022,7 +7012,7 @@
         </p:nvGraphicFramePr>
         <p:xfrm>
           <a:off x="502920" y="1645920"/>
-          <a:ext cx="11185855" cy="3291840"/>
+          <a:ext cx="10762488" cy="3291840"/>
         </p:xfrm>
         <a:graphic>
           <a:graphicData uri="http://schemas.openxmlformats.org/drawingml/2006/table">
@@ -10649,7 +10639,7 @@
               <a:buNone/>
             </a:pPr>
             <a:r>
-              <a:rPr lang="en-US" sz="1500" b="1" dirty="0">
+              <a:rPr lang="en-US" sz="1500" b="1">
                 <a:solidFill>
                   <a:srgbClr val="FFFFFF"/>
                 </a:solidFill>
@@ -10657,7 +10647,18 @@
                 <a:ea typeface="Cambria" pitchFamily="34" charset="-122"/>
                 <a:cs typeface="Cambria" pitchFamily="34" charset="-120"/>
               </a:rPr>
-              <a:t>몬스터 AI</a:t>
+              <a:t>몬스터 </a:t>
+            </a:r>
+            <a:r>
+              <a:rPr lang="ko-KR" altLang="en-US" sz="1500" b="1">
+                <a:solidFill>
+                  <a:srgbClr val="FFFFFF"/>
+                </a:solidFill>
+                <a:latin typeface="Cambria" pitchFamily="34" charset="0"/>
+                <a:ea typeface="Cambria" pitchFamily="34" charset="-122"/>
+                <a:cs typeface="Cambria" pitchFamily="34" charset="-120"/>
+              </a:rPr>
+              <a:t>동작</a:t>
             </a:r>
             <a:endParaRPr lang="en-US" sz="1500" dirty="0"/>
           </a:p>

--- a/QT_Project.pptx
+++ b/QT_Project.pptx
@@ -1734,7 +1734,40 @@
                 <a:ea typeface="Cambria" pitchFamily="34" charset="-122"/>
                 <a:cs typeface="Cambria" pitchFamily="34" charset="-120"/>
               </a:rPr>
-              <a:t>두 개의 독립 라이브러리로 구성</a:t>
+              <a:t>두 </a:t>
+            </a:r>
+            <a:r>
+              <a:rPr lang="en-US" sz="3000" b="1">
+                <a:solidFill>
+                  <a:srgbClr val="1A1A2E"/>
+                </a:solidFill>
+                <a:latin typeface="Cambria" pitchFamily="34" charset="0"/>
+                <a:ea typeface="Cambria" pitchFamily="34" charset="-122"/>
+                <a:cs typeface="Cambria" pitchFamily="34" charset="-120"/>
+              </a:rPr>
+              <a:t>개의 </a:t>
+            </a:r>
+            <a:r>
+              <a:rPr lang="ko-KR" altLang="en-US" sz="3000" b="1">
+                <a:solidFill>
+                  <a:srgbClr val="1A1A2E"/>
+                </a:solidFill>
+                <a:latin typeface="Cambria" pitchFamily="34" charset="0"/>
+                <a:ea typeface="Cambria" pitchFamily="34" charset="-122"/>
+                <a:cs typeface="Cambria" pitchFamily="34" charset="-120"/>
+              </a:rPr>
+              <a:t>주요</a:t>
+            </a:r>
+            <a:r>
+              <a:rPr lang="en-US" sz="3000" b="1">
+                <a:solidFill>
+                  <a:srgbClr val="1A1A2E"/>
+                </a:solidFill>
+                <a:latin typeface="Cambria" pitchFamily="34" charset="0"/>
+                <a:ea typeface="Cambria" pitchFamily="34" charset="-122"/>
+                <a:cs typeface="Cambria" pitchFamily="34" charset="-120"/>
+              </a:rPr>
+              <a:t> 라이브러리</a:t>
             </a:r>
             <a:endParaRPr lang="en-US" sz="3000" dirty="0"/>
           </a:p>
